--- a/presentation_puls_events.pptx
+++ b/presentation_puls_events.pptx
@@ -1215,7 +1215,7 @@
           <a:p>
             <a:r>
               <a:rPr lang="en-US" dirty="0"/>
-              <a:t>Build ~3200 EUR (developpement alternant inclus) · OPEX ~210 EUR/mois pour 1000 users · monter à ~1700-2000 EUR/mois pour 10x (optimisable via Gemini Flash)</a:t>
+              <a:t>Build ~3200 EUR (developpement alternant inclus) · OPEX ~210 EUR/mois pour 1000 users · monter à ~1700-2000 EUR/mois pour 10x (optimisable via Gemini 1.5 Flash)</a:t>
             </a:r>
             <a:endParaRPr lang="en-US" dirty="0"/>
           </a:p>
